--- a/evals/previews/plos-rnaseq-tool-comparison/plos-rnaseq-tool-comparison.pptx
+++ b/evals/previews/plos-rnaseq-tool-comparison/plos-rnaseq-tool-comparison.pptx
@@ -2,13 +2,13 @@
 <file path=ppt/presentation.xml><?xml version="1.0" encoding="utf-8"?>
 <p:presentation xmlns:p="http://schemas.openxmlformats.org/presentationml/2006/main">
   <p:sldMasterIdLst>
-    <p:sldMasterId xmlns:r="http://schemas.openxmlformats.org/officeDocument/2006/relationships" id="2147483648" r:id="Rf71e4b9a6baf4032"/>
+    <p:sldMasterId xmlns:r="http://schemas.openxmlformats.org/officeDocument/2006/relationships" id="2147483648" r:id="R06208d8f58b74a05"/>
   </p:sldMasterIdLst>
   <p:notesMasterIdLst>
-    <p:notesMasterId xmlns:r="http://schemas.openxmlformats.org/officeDocument/2006/relationships" r:id="R3aa943bce2524482"/>
+    <p:notesMasterId xmlns:r="http://schemas.openxmlformats.org/officeDocument/2006/relationships" r:id="R644b179d411c450d"/>
   </p:notesMasterIdLst>
   <p:sldIdLst>
-    <p:sldId xmlns:r="http://schemas.openxmlformats.org/officeDocument/2006/relationships" id="256" r:id="R13e22555fc244c77"/>
+    <p:sldId xmlns:r="http://schemas.openxmlformats.org/officeDocument/2006/relationships" id="256" r:id="R2f399f1ca5a144c6"/>
   </p:sldIdLst>
   <p:sldSz cx="42805350" cy="30279975"/>
   <p:notesSz cx="6858000" cy="9144000"/>
@@ -525,7 +525,7 @@
   </p:cSld>
   <p:clrMap bg1="lt1" tx1="dk1" bg2="lt2" tx2="dk2" accent1="accent1" accent2="accent2" accent3="accent3" accent4="accent4" accent5="accent5" accent6="accent6" hlink="hlink" folHlink="folHlink"/>
   <p:sldLayoutIdLst>
-    <p:sldLayoutId xmlns:r="http://schemas.openxmlformats.org/officeDocument/2006/relationships" id="2147483649" r:id="Ra71e6887050c4c5f"/>
+    <p:sldLayoutId xmlns:r="http://schemas.openxmlformats.org/officeDocument/2006/relationships" id="2147483649" r:id="Rb41395a9717f49da"/>
   </p:sldLayoutIdLst>
   <p:txStyles>
     <p:titleStyle>
@@ -1076,7 +1076,7 @@
           <p:cNvPr id="92" name="header-band">
             <a:extLst xmlns:a="http://schemas.openxmlformats.org/drawingml/2006/main">
               <a:ext uri="{FF2B5EF4-FFF2-40B4-BE49-F238E27FC236}">
-                <a16:creationId xmlns:a16="http://schemas.microsoft.com/office/drawing/2014/main" id="{8CD0C2B7-9761-4D6A-8D20-7375F74C806D}"/>
+                <a16:creationId xmlns:a16="http://schemas.microsoft.com/office/drawing/2014/main" id="{D9497E17-EE43-4204-8972-24BC4CA973E3}"/>
               </a:ext>
             </a:extLst>
           </p:cNvPr>
@@ -1109,7 +1109,7 @@
           <p:cNvPr id="2" name="top-accent">
             <a:extLst xmlns:a="http://schemas.openxmlformats.org/drawingml/2006/main">
               <a:ext uri="{FF2B5EF4-FFF2-40B4-BE49-F238E27FC236}">
-                <a16:creationId xmlns:a16="http://schemas.microsoft.com/office/drawing/2014/main" id="{57E76DE0-E1BF-4C3E-84E4-A2511325F24A}"/>
+                <a16:creationId xmlns:a16="http://schemas.microsoft.com/office/drawing/2014/main" id="{4176968C-5B31-4434-AB60-99DA69451397}"/>
               </a:ext>
             </a:extLst>
           </p:cNvPr>
@@ -1142,7 +1142,7 @@
           <p:cNvPr id="3" name="poster-title">
             <a:extLst xmlns:a="http://schemas.openxmlformats.org/drawingml/2006/main">
               <a:ext uri="{FF2B5EF4-FFF2-40B4-BE49-F238E27FC236}">
-                <a16:creationId xmlns:a16="http://schemas.microsoft.com/office/drawing/2014/main" id="{3758DE9A-8086-4507-9900-9E38F4F9D0B7}"/>
+                <a16:creationId xmlns:a16="http://schemas.microsoft.com/office/drawing/2014/main" id="{7E86E2F4-5D12-42C1-9B1C-A3029FE62043}"/>
               </a:ext>
             </a:extLst>
           </p:cNvPr>
@@ -1192,7 +1192,7 @@
           <p:cNvPr id="4" name="authors">
             <a:extLst xmlns:a="http://schemas.openxmlformats.org/drawingml/2006/main">
               <a:ext uri="{FF2B5EF4-FFF2-40B4-BE49-F238E27FC236}">
-                <a16:creationId xmlns:a16="http://schemas.microsoft.com/office/drawing/2014/main" id="{89366F37-3961-4C6F-B6DB-FF8CC720F7AC}"/>
+                <a16:creationId xmlns:a16="http://schemas.microsoft.com/office/drawing/2014/main" id="{CFD014EF-CC3F-424E-BDC4-C55C88D0F793}"/>
               </a:ext>
             </a:extLst>
           </p:cNvPr>
@@ -1242,7 +1242,7 @@
           <p:cNvPr id="5" name="affiliations">
             <a:extLst xmlns:a="http://schemas.openxmlformats.org/drawingml/2006/main">
               <a:ext uri="{FF2B5EF4-FFF2-40B4-BE49-F238E27FC236}">
-                <a16:creationId xmlns:a16="http://schemas.microsoft.com/office/drawing/2014/main" id="{77656E68-C387-432E-9160-0D8A620D8A24}"/>
+                <a16:creationId xmlns:a16="http://schemas.microsoft.com/office/drawing/2014/main" id="{A4DCA6E1-486A-4DAB-80E1-8E2192E70ACD}"/>
               </a:ext>
             </a:extLst>
           </p:cNvPr>
@@ -1292,7 +1292,7 @@
           <p:cNvPr id="6" name="citation">
             <a:extLst xmlns:a="http://schemas.openxmlformats.org/drawingml/2006/main">
               <a:ext uri="{FF2B5EF4-FFF2-40B4-BE49-F238E27FC236}">
-                <a16:creationId xmlns:a16="http://schemas.microsoft.com/office/drawing/2014/main" id="{11EE8D5E-CA42-46EA-8302-81F55E2D8DB5}"/>
+                <a16:creationId xmlns:a16="http://schemas.microsoft.com/office/drawing/2014/main" id="{DFE7410A-BFF1-40A0-9DD6-AFF003A76578}"/>
               </a:ext>
             </a:extLst>
           </p:cNvPr>
@@ -1342,7 +1342,7 @@
           <p:cNvPr id="7" name="logo-slot-institution-logo">
             <a:extLst xmlns:a="http://schemas.openxmlformats.org/drawingml/2006/main">
               <a:ext uri="{FF2B5EF4-FFF2-40B4-BE49-F238E27FC236}">
-                <a16:creationId xmlns:a16="http://schemas.microsoft.com/office/drawing/2014/main" id="{21DDD92A-8405-4FF0-A633-4A97A76630B6}"/>
+                <a16:creationId xmlns:a16="http://schemas.microsoft.com/office/drawing/2014/main" id="{0B882BCB-D7A0-4F7D-B1B2-EEC36D6A7534}"/>
               </a:ext>
             </a:extLst>
           </p:cNvPr>
@@ -1377,7 +1377,7 @@
           <p:cNvPr id="8" name="logo-placeholder-institution-logo">
             <a:extLst xmlns:a="http://schemas.openxmlformats.org/drawingml/2006/main">
               <a:ext uri="{FF2B5EF4-FFF2-40B4-BE49-F238E27FC236}">
-                <a16:creationId xmlns:a16="http://schemas.microsoft.com/office/drawing/2014/main" id="{64B54719-09C5-4C12-8143-3047B1422530}"/>
+                <a16:creationId xmlns:a16="http://schemas.microsoft.com/office/drawing/2014/main" id="{5E4FAD85-8721-457F-8B37-765278C03BA2}"/>
               </a:ext>
             </a:extLst>
           </p:cNvPr>
@@ -1427,7 +1427,7 @@
           <p:cNvPr id="9" name="header-summary">
             <a:extLst xmlns:a="http://schemas.openxmlformats.org/drawingml/2006/main">
               <a:ext uri="{FF2B5EF4-FFF2-40B4-BE49-F238E27FC236}">
-                <a16:creationId xmlns:a16="http://schemas.microsoft.com/office/drawing/2014/main" id="{C5FA9A69-E6F1-40F9-81B9-CA7C0090423C}"/>
+                <a16:creationId xmlns:a16="http://schemas.microsoft.com/office/drawing/2014/main" id="{D28760D9-268C-4C0E-945F-B82AB32DC9F7}"/>
               </a:ext>
             </a:extLst>
           </p:cNvPr>
@@ -1460,7 +1460,7 @@
           <p:cNvPr id="10" name="header-metric-1-value">
             <a:extLst xmlns:a="http://schemas.openxmlformats.org/drawingml/2006/main">
               <a:ext uri="{FF2B5EF4-FFF2-40B4-BE49-F238E27FC236}">
-                <a16:creationId xmlns:a16="http://schemas.microsoft.com/office/drawing/2014/main" id="{A8C80F99-941C-404D-AF23-CF328F794EC6}"/>
+                <a16:creationId xmlns:a16="http://schemas.microsoft.com/office/drawing/2014/main" id="{43064A28-4C70-420A-A289-E595D5BC20E6}"/>
               </a:ext>
             </a:extLst>
           </p:cNvPr>
@@ -1510,7 +1510,7 @@
           <p:cNvPr id="11" name="header-metric-1-label">
             <a:extLst xmlns:a="http://schemas.openxmlformats.org/drawingml/2006/main">
               <a:ext uri="{FF2B5EF4-FFF2-40B4-BE49-F238E27FC236}">
-                <a16:creationId xmlns:a16="http://schemas.microsoft.com/office/drawing/2014/main" id="{BE73CF84-302E-4BDF-8024-6F8B03C2BFF5}"/>
+                <a16:creationId xmlns:a16="http://schemas.microsoft.com/office/drawing/2014/main" id="{2AB68CCF-562D-4ADF-B7CA-77F9CC38BA2D}"/>
               </a:ext>
             </a:extLst>
           </p:cNvPr>
@@ -1560,7 +1560,7 @@
           <p:cNvPr id="12" name="header-metric-2-value">
             <a:extLst xmlns:a="http://schemas.openxmlformats.org/drawingml/2006/main">
               <a:ext uri="{FF2B5EF4-FFF2-40B4-BE49-F238E27FC236}">
-                <a16:creationId xmlns:a16="http://schemas.microsoft.com/office/drawing/2014/main" id="{C5AAA608-B473-4E35-B13E-8055A8EA63C3}"/>
+                <a16:creationId xmlns:a16="http://schemas.microsoft.com/office/drawing/2014/main" id="{DE67EBE0-AB38-4C76-903B-29162E4DA7E0}"/>
               </a:ext>
             </a:extLst>
           </p:cNvPr>
@@ -1610,7 +1610,7 @@
           <p:cNvPr id="13" name="header-metric-2-label">
             <a:extLst xmlns:a="http://schemas.openxmlformats.org/drawingml/2006/main">
               <a:ext uri="{FF2B5EF4-FFF2-40B4-BE49-F238E27FC236}">
-                <a16:creationId xmlns:a16="http://schemas.microsoft.com/office/drawing/2014/main" id="{188B73F3-3269-4AB3-90E0-0CD1D8A548B8}"/>
+                <a16:creationId xmlns:a16="http://schemas.microsoft.com/office/drawing/2014/main" id="{B7BBFBC7-190B-4726-8C55-96BFD469A339}"/>
               </a:ext>
             </a:extLst>
           </p:cNvPr>
@@ -1660,7 +1660,7 @@
           <p:cNvPr id="14" name="header-metric-3-value">
             <a:extLst xmlns:a="http://schemas.openxmlformats.org/drawingml/2006/main">
               <a:ext uri="{FF2B5EF4-FFF2-40B4-BE49-F238E27FC236}">
-                <a16:creationId xmlns:a16="http://schemas.microsoft.com/office/drawing/2014/main" id="{6D5EBDED-E0EE-4BF6-B058-C17AC1C8B0E7}"/>
+                <a16:creationId xmlns:a16="http://schemas.microsoft.com/office/drawing/2014/main" id="{0A34B51A-9B63-47D4-ABD4-53B38E628499}"/>
               </a:ext>
             </a:extLst>
           </p:cNvPr>
@@ -1710,7 +1710,7 @@
           <p:cNvPr id="15" name="header-metric-3-label">
             <a:extLst xmlns:a="http://schemas.openxmlformats.org/drawingml/2006/main">
               <a:ext uri="{FF2B5EF4-FFF2-40B4-BE49-F238E27FC236}">
-                <a16:creationId xmlns:a16="http://schemas.microsoft.com/office/drawing/2014/main" id="{EE8B38B4-8DD5-41D5-B9FC-6E4A9DEE6ECB}"/>
+                <a16:creationId xmlns:a16="http://schemas.microsoft.com/office/drawing/2014/main" id="{9C2160B4-CF35-4E2E-9AEC-E03CC7E0FDB5}"/>
               </a:ext>
             </a:extLst>
           </p:cNvPr>
@@ -1760,7 +1760,7 @@
           <p:cNvPr id="16" name="question-title">
             <a:extLst xmlns:a="http://schemas.openxmlformats.org/drawingml/2006/main">
               <a:ext uri="{FF2B5EF4-FFF2-40B4-BE49-F238E27FC236}">
-                <a16:creationId xmlns:a16="http://schemas.microsoft.com/office/drawing/2014/main" id="{3ED15834-37E1-4A3C-95D2-F1A31C5642AF}"/>
+                <a16:creationId xmlns:a16="http://schemas.microsoft.com/office/drawing/2014/main" id="{285300E9-F6B8-48C5-9E9D-80FE53BC8FAC}"/>
               </a:ext>
             </a:extLst>
           </p:cNvPr>
@@ -1810,7 +1810,7 @@
           <p:cNvPr id="17" name="question-rule">
             <a:extLst xmlns:a="http://schemas.openxmlformats.org/drawingml/2006/main">
               <a:ext uri="{FF2B5EF4-FFF2-40B4-BE49-F238E27FC236}">
-                <a16:creationId xmlns:a16="http://schemas.microsoft.com/office/drawing/2014/main" id="{27CD1B64-0487-4027-AB93-581FF737E4E5}"/>
+                <a16:creationId xmlns:a16="http://schemas.microsoft.com/office/drawing/2014/main" id="{E5EE1973-A842-40B1-B5BE-4332AA3F0FA9}"/>
               </a:ext>
             </a:extLst>
           </p:cNvPr>
@@ -1843,7 +1843,7 @@
           <p:cNvPr id="18" name="research-question">
             <a:extLst xmlns:a="http://schemas.openxmlformats.org/drawingml/2006/main">
               <a:ext uri="{FF2B5EF4-FFF2-40B4-BE49-F238E27FC236}">
-                <a16:creationId xmlns:a16="http://schemas.microsoft.com/office/drawing/2014/main" id="{813E20F0-9A94-4AFD-AD54-7FC0931DA912}"/>
+                <a16:creationId xmlns:a16="http://schemas.microsoft.com/office/drawing/2014/main" id="{1C9D0D8E-500D-4078-AB6D-9F65A10913DB}"/>
               </a:ext>
             </a:extLst>
           </p:cNvPr>
@@ -1893,7 +1893,7 @@
           <p:cNvPr id="19" name="question-evidence">
             <a:extLst xmlns:a="http://schemas.openxmlformats.org/drawingml/2006/main">
               <a:ext uri="{FF2B5EF4-FFF2-40B4-BE49-F238E27FC236}">
-                <a16:creationId xmlns:a16="http://schemas.microsoft.com/office/drawing/2014/main" id="{B57F6211-AA56-4E51-BC70-93355B77D27F}"/>
+                <a16:creationId xmlns:a16="http://schemas.microsoft.com/office/drawing/2014/main" id="{D46439E3-3AA2-4803-A681-6D29A869C063}"/>
               </a:ext>
             </a:extLst>
           </p:cNvPr>
@@ -1943,7 +1943,7 @@
           <p:cNvPr id="20" name="pipeline-title">
             <a:extLst xmlns:a="http://schemas.openxmlformats.org/drawingml/2006/main">
               <a:ext uri="{FF2B5EF4-FFF2-40B4-BE49-F238E27FC236}">
-                <a16:creationId xmlns:a16="http://schemas.microsoft.com/office/drawing/2014/main" id="{E53A6315-FCD2-467E-A5E7-C5FA174A46B3}"/>
+                <a16:creationId xmlns:a16="http://schemas.microsoft.com/office/drawing/2014/main" id="{6F81832B-5796-4D00-9801-791030A50EFF}"/>
               </a:ext>
             </a:extLst>
           </p:cNvPr>
@@ -1993,7 +1993,7 @@
           <p:cNvPr id="21" name="pipeline-rule">
             <a:extLst xmlns:a="http://schemas.openxmlformats.org/drawingml/2006/main">
               <a:ext uri="{FF2B5EF4-FFF2-40B4-BE49-F238E27FC236}">
-                <a16:creationId xmlns:a16="http://schemas.microsoft.com/office/drawing/2014/main" id="{6557CA42-765C-4354-923C-486D24330FAA}"/>
+                <a16:creationId xmlns:a16="http://schemas.microsoft.com/office/drawing/2014/main" id="{2A0F4111-E59C-4A1F-AFEB-5ACB2A960F9E}"/>
               </a:ext>
             </a:extLst>
           </p:cNvPr>
@@ -2026,7 +2026,7 @@
           <p:cNvPr id="22" name="pipeline-1-number-bg">
             <a:extLst xmlns:a="http://schemas.openxmlformats.org/drawingml/2006/main">
               <a:ext uri="{FF2B5EF4-FFF2-40B4-BE49-F238E27FC236}">
-                <a16:creationId xmlns:a16="http://schemas.microsoft.com/office/drawing/2014/main" id="{C2731E43-86A2-470B-B35F-446A5E98D83C}"/>
+                <a16:creationId xmlns:a16="http://schemas.microsoft.com/office/drawing/2014/main" id="{CE664DE0-0ABC-4EBD-BFEF-BC238E63AD37}"/>
               </a:ext>
             </a:extLst>
           </p:cNvPr>
@@ -2059,7 +2059,7 @@
           <p:cNvPr id="23" name="pipeline-1-number">
             <a:extLst xmlns:a="http://schemas.openxmlformats.org/drawingml/2006/main">
               <a:ext uri="{FF2B5EF4-FFF2-40B4-BE49-F238E27FC236}">
-                <a16:creationId xmlns:a16="http://schemas.microsoft.com/office/drawing/2014/main" id="{84B8D00A-C3A2-4FE7-A442-E99E1AE413FB}"/>
+                <a16:creationId xmlns:a16="http://schemas.microsoft.com/office/drawing/2014/main" id="{F817A45C-8A8C-42CA-90E0-54160D01CF5D}"/>
               </a:ext>
             </a:extLst>
           </p:cNvPr>
@@ -2109,7 +2109,7 @@
           <p:cNvPr id="24" name="pipeline-1-text">
             <a:extLst xmlns:a="http://schemas.openxmlformats.org/drawingml/2006/main">
               <a:ext uri="{FF2B5EF4-FFF2-40B4-BE49-F238E27FC236}">
-                <a16:creationId xmlns:a16="http://schemas.microsoft.com/office/drawing/2014/main" id="{6801C22C-749A-487C-BB09-FC7024171EAA}"/>
+                <a16:creationId xmlns:a16="http://schemas.microsoft.com/office/drawing/2014/main" id="{F644E310-4603-42BB-8A84-E2EA2594A409}"/>
               </a:ext>
             </a:extLst>
           </p:cNvPr>
@@ -2159,7 +2159,7 @@
           <p:cNvPr id="25" name="pipeline-2-number-bg">
             <a:extLst xmlns:a="http://schemas.openxmlformats.org/drawingml/2006/main">
               <a:ext uri="{FF2B5EF4-FFF2-40B4-BE49-F238E27FC236}">
-                <a16:creationId xmlns:a16="http://schemas.microsoft.com/office/drawing/2014/main" id="{70442CA8-B99C-4DBF-B389-D59A370C729B}"/>
+                <a16:creationId xmlns:a16="http://schemas.microsoft.com/office/drawing/2014/main" id="{FFB98121-07C1-4F0C-995A-77D14F92B3CC}"/>
               </a:ext>
             </a:extLst>
           </p:cNvPr>
@@ -2192,7 +2192,7 @@
           <p:cNvPr id="26" name="pipeline-2-number">
             <a:extLst xmlns:a="http://schemas.openxmlformats.org/drawingml/2006/main">
               <a:ext uri="{FF2B5EF4-FFF2-40B4-BE49-F238E27FC236}">
-                <a16:creationId xmlns:a16="http://schemas.microsoft.com/office/drawing/2014/main" id="{1A1526CB-F71C-4E1E-82C6-037E3D5BEF19}"/>
+                <a16:creationId xmlns:a16="http://schemas.microsoft.com/office/drawing/2014/main" id="{B5C97378-2A18-4983-B989-4F60C164D5B1}"/>
               </a:ext>
             </a:extLst>
           </p:cNvPr>
@@ -2242,7 +2242,7 @@
           <p:cNvPr id="27" name="pipeline-2-text">
             <a:extLst xmlns:a="http://schemas.openxmlformats.org/drawingml/2006/main">
               <a:ext uri="{FF2B5EF4-FFF2-40B4-BE49-F238E27FC236}">
-                <a16:creationId xmlns:a16="http://schemas.microsoft.com/office/drawing/2014/main" id="{7882F17C-A84B-4934-AEFE-A5C773B1FF1A}"/>
+                <a16:creationId xmlns:a16="http://schemas.microsoft.com/office/drawing/2014/main" id="{A8DFCF32-8450-46F8-ABB7-44433CBE7D05}"/>
               </a:ext>
             </a:extLst>
           </p:cNvPr>
@@ -2292,7 +2292,7 @@
           <p:cNvPr id="28" name="pipeline-3-number-bg">
             <a:extLst xmlns:a="http://schemas.openxmlformats.org/drawingml/2006/main">
               <a:ext uri="{FF2B5EF4-FFF2-40B4-BE49-F238E27FC236}">
-                <a16:creationId xmlns:a16="http://schemas.microsoft.com/office/drawing/2014/main" id="{63F8E527-9EA9-472E-AC2F-61B2DCE8C938}"/>
+                <a16:creationId xmlns:a16="http://schemas.microsoft.com/office/drawing/2014/main" id="{2662DFA3-F709-4C2E-B366-104B735B9ED1}"/>
               </a:ext>
             </a:extLst>
           </p:cNvPr>
@@ -2325,7 +2325,7 @@
           <p:cNvPr id="29" name="pipeline-3-number">
             <a:extLst xmlns:a="http://schemas.openxmlformats.org/drawingml/2006/main">
               <a:ext uri="{FF2B5EF4-FFF2-40B4-BE49-F238E27FC236}">
-                <a16:creationId xmlns:a16="http://schemas.microsoft.com/office/drawing/2014/main" id="{01F059E7-2FC6-45AE-B9DF-8D5AEF62BAF5}"/>
+                <a16:creationId xmlns:a16="http://schemas.microsoft.com/office/drawing/2014/main" id="{A3F97E75-E027-4C89-8F2F-DA9DD8B7A882}"/>
               </a:ext>
             </a:extLst>
           </p:cNvPr>
@@ -2375,7 +2375,7 @@
           <p:cNvPr id="30" name="pipeline-3-text">
             <a:extLst xmlns:a="http://schemas.openxmlformats.org/drawingml/2006/main">
               <a:ext uri="{FF2B5EF4-FFF2-40B4-BE49-F238E27FC236}">
-                <a16:creationId xmlns:a16="http://schemas.microsoft.com/office/drawing/2014/main" id="{84934512-7EA2-41DF-95D0-3D6FC4733501}"/>
+                <a16:creationId xmlns:a16="http://schemas.microsoft.com/office/drawing/2014/main" id="{E59A27CF-10C6-4B23-9A00-419175F7838F}"/>
               </a:ext>
             </a:extLst>
           </p:cNvPr>
@@ -2425,7 +2425,7 @@
           <p:cNvPr id="31" name="pipeline-4-number-bg">
             <a:extLst xmlns:a="http://schemas.openxmlformats.org/drawingml/2006/main">
               <a:ext uri="{FF2B5EF4-FFF2-40B4-BE49-F238E27FC236}">
-                <a16:creationId xmlns:a16="http://schemas.microsoft.com/office/drawing/2014/main" id="{204ABF3E-EBAD-45B9-900F-19FB7B6DF8A3}"/>
+                <a16:creationId xmlns:a16="http://schemas.microsoft.com/office/drawing/2014/main" id="{4CC60E17-E39E-4CBA-B9E2-58435E23F138}"/>
               </a:ext>
             </a:extLst>
           </p:cNvPr>
@@ -2458,7 +2458,7 @@
           <p:cNvPr id="32" name="pipeline-4-number">
             <a:extLst xmlns:a="http://schemas.openxmlformats.org/drawingml/2006/main">
               <a:ext uri="{FF2B5EF4-FFF2-40B4-BE49-F238E27FC236}">
-                <a16:creationId xmlns:a16="http://schemas.microsoft.com/office/drawing/2014/main" id="{7A1754F2-B68B-4D8C-8AC4-F10BF025365D}"/>
+                <a16:creationId xmlns:a16="http://schemas.microsoft.com/office/drawing/2014/main" id="{95D975D5-787E-4DCB-958D-3DD18B43657E}"/>
               </a:ext>
             </a:extLst>
           </p:cNvPr>
@@ -2508,7 +2508,7 @@
           <p:cNvPr id="33" name="pipeline-4-text">
             <a:extLst xmlns:a="http://schemas.openxmlformats.org/drawingml/2006/main">
               <a:ext uri="{FF2B5EF4-FFF2-40B4-BE49-F238E27FC236}">
-                <a16:creationId xmlns:a16="http://schemas.microsoft.com/office/drawing/2014/main" id="{AA992532-5509-4420-B023-89370868E020}"/>
+                <a16:creationId xmlns:a16="http://schemas.microsoft.com/office/drawing/2014/main" id="{D0069A0B-474B-49A1-A2A9-5016DC05AD99}"/>
               </a:ext>
             </a:extLst>
           </p:cNvPr>
@@ -2558,7 +2558,7 @@
           <p:cNvPr id="34" name="dataset-panel">
             <a:extLst xmlns:a="http://schemas.openxmlformats.org/drawingml/2006/main">
               <a:ext uri="{FF2B5EF4-FFF2-40B4-BE49-F238E27FC236}">
-                <a16:creationId xmlns:a16="http://schemas.microsoft.com/office/drawing/2014/main" id="{2C812601-2AAD-4FF8-B931-FE73EC0913D1}"/>
+                <a16:creationId xmlns:a16="http://schemas.microsoft.com/office/drawing/2014/main" id="{40673D52-9416-4DCD-B21C-42CB2A660B8B}"/>
               </a:ext>
             </a:extLst>
           </p:cNvPr>
@@ -2593,7 +2593,7 @@
           <p:cNvPr id="35" name="dataset-kicker">
             <a:extLst xmlns:a="http://schemas.openxmlformats.org/drawingml/2006/main">
               <a:ext uri="{FF2B5EF4-FFF2-40B4-BE49-F238E27FC236}">
-                <a16:creationId xmlns:a16="http://schemas.microsoft.com/office/drawing/2014/main" id="{D3FD3F81-B3C7-40A8-9D06-C5BF86FF56E6}"/>
+                <a16:creationId xmlns:a16="http://schemas.microsoft.com/office/drawing/2014/main" id="{0D508A5A-62BD-4B5C-B196-B1C95A346D75}"/>
               </a:ext>
             </a:extLst>
           </p:cNvPr>
@@ -2643,7 +2643,7 @@
           <p:cNvPr id="36" name="datasets">
             <a:extLst xmlns:a="http://schemas.openxmlformats.org/drawingml/2006/main">
               <a:ext uri="{FF2B5EF4-FFF2-40B4-BE49-F238E27FC236}">
-                <a16:creationId xmlns:a16="http://schemas.microsoft.com/office/drawing/2014/main" id="{3A5EA5A3-00DF-4540-AE47-E5ED288F6592}"/>
+                <a16:creationId xmlns:a16="http://schemas.microsoft.com/office/drawing/2014/main" id="{241F3AC2-5048-4BAA-8BED-A1B30DB2DE20}"/>
               </a:ext>
             </a:extLst>
           </p:cNvPr>
@@ -2744,7 +2744,7 @@
           <p:cNvPr id="37" name="dataset-evidence">
             <a:extLst xmlns:a="http://schemas.openxmlformats.org/drawingml/2006/main">
               <a:ext uri="{FF2B5EF4-FFF2-40B4-BE49-F238E27FC236}">
-                <a16:creationId xmlns:a16="http://schemas.microsoft.com/office/drawing/2014/main" id="{FABD482D-386F-402C-A3CE-223526963DBB}"/>
+                <a16:creationId xmlns:a16="http://schemas.microsoft.com/office/drawing/2014/main" id="{025F5A7A-8D1F-4DA7-A7C2-DA0E68952C1A}"/>
               </a:ext>
             </a:extLst>
           </p:cNvPr>
@@ -2794,7 +2794,7 @@
           <p:cNvPr id="38" name="figure-one-heading-title">
             <a:extLst xmlns:a="http://schemas.openxmlformats.org/drawingml/2006/main">
               <a:ext uri="{FF2B5EF4-FFF2-40B4-BE49-F238E27FC236}">
-                <a16:creationId xmlns:a16="http://schemas.microsoft.com/office/drawing/2014/main" id="{D58BBE13-8332-4B19-B047-04C90805DE01}"/>
+                <a16:creationId xmlns:a16="http://schemas.microsoft.com/office/drawing/2014/main" id="{4AFAC763-8922-4DAC-A464-390C64A6FBEF}"/>
               </a:ext>
             </a:extLst>
           </p:cNvPr>
@@ -2844,7 +2844,7 @@
           <p:cNvPr id="39" name="figure-one-heading-rule">
             <a:extLst xmlns:a="http://schemas.openxmlformats.org/drawingml/2006/main">
               <a:ext uri="{FF2B5EF4-FFF2-40B4-BE49-F238E27FC236}">
-                <a16:creationId xmlns:a16="http://schemas.microsoft.com/office/drawing/2014/main" id="{B15829E7-398B-4C65-AC4B-DDE0B99500EC}"/>
+                <a16:creationId xmlns:a16="http://schemas.microsoft.com/office/drawing/2014/main" id="{C05ECCFC-D242-40DF-8DD9-145CAB4826D2}"/>
               </a:ext>
             </a:extLst>
           </p:cNvPr>
@@ -2877,7 +2877,7 @@
           <p:cNvPr id="40" name="figure-one-frame">
             <a:extLst xmlns:a="http://schemas.openxmlformats.org/drawingml/2006/main">
               <a:ext uri="{FF2B5EF4-FFF2-40B4-BE49-F238E27FC236}">
-                <a16:creationId xmlns:a16="http://schemas.microsoft.com/office/drawing/2014/main" id="{FFB472AF-CAD1-4DC7-B44B-0568521251FF}"/>
+                <a16:creationId xmlns:a16="http://schemas.microsoft.com/office/drawing/2014/main" id="{E798B3F7-3444-4BA4-97FA-511FD4580EAA}"/>
               </a:ext>
             </a:extLst>
           </p:cNvPr>
@@ -2912,7 +2912,7 @@
           <p:cNvPr id="41" name="figure-one-placeholder">
             <a:extLst xmlns:a="http://schemas.openxmlformats.org/drawingml/2006/main">
               <a:ext uri="{FF2B5EF4-FFF2-40B4-BE49-F238E27FC236}">
-                <a16:creationId xmlns:a16="http://schemas.microsoft.com/office/drawing/2014/main" id="{62BBBD1E-B845-479A-9A4B-92701A0B1E4B}"/>
+                <a16:creationId xmlns:a16="http://schemas.microsoft.com/office/drawing/2014/main" id="{753079BA-32BA-4B36-8573-D6E6C0F8CBBE}"/>
               </a:ext>
             </a:extLst>
           </p:cNvPr>
@@ -2947,7 +2947,7 @@
           <p:cNvPr id="42" name="figure-one-placeholder-label">
             <a:extLst xmlns:a="http://schemas.openxmlformats.org/drawingml/2006/main">
               <a:ext uri="{FF2B5EF4-FFF2-40B4-BE49-F238E27FC236}">
-                <a16:creationId xmlns:a16="http://schemas.microsoft.com/office/drawing/2014/main" id="{90BABAF8-11E9-4E71-A121-9F4BBB8C2D61}"/>
+                <a16:creationId xmlns:a16="http://schemas.microsoft.com/office/drawing/2014/main" id="{868FDE4A-A9C7-43B1-BB21-77706D9CDF2E}"/>
               </a:ext>
             </a:extLst>
           </p:cNvPr>
@@ -2997,7 +2997,7 @@
           <p:cNvPr id="43" name="figure-one-caption">
             <a:extLst xmlns:a="http://schemas.openxmlformats.org/drawingml/2006/main">
               <a:ext uri="{FF2B5EF4-FFF2-40B4-BE49-F238E27FC236}">
-                <a16:creationId xmlns:a16="http://schemas.microsoft.com/office/drawing/2014/main" id="{E726C27C-B660-4D7A-B3F5-23E71673380C}"/>
+                <a16:creationId xmlns:a16="http://schemas.microsoft.com/office/drawing/2014/main" id="{A435A310-4D6B-42A0-859E-A5EF43F355DD}"/>
               </a:ext>
             </a:extLst>
           </p:cNvPr>
@@ -3047,7 +3047,7 @@
           <p:cNvPr id="44" name="figure-one-source">
             <a:extLst xmlns:a="http://schemas.openxmlformats.org/drawingml/2006/main">
               <a:ext uri="{FF2B5EF4-FFF2-40B4-BE49-F238E27FC236}">
-                <a16:creationId xmlns:a16="http://schemas.microsoft.com/office/drawing/2014/main" id="{15468BED-7F9D-41BC-A11A-278A91A99ABF}"/>
+                <a16:creationId xmlns:a16="http://schemas.microsoft.com/office/drawing/2014/main" id="{D52AEB2B-94E6-4DB0-BF18-04B1E268B040}"/>
               </a:ext>
             </a:extLst>
           </p:cNvPr>
@@ -3097,7 +3097,7 @@
           <p:cNvPr id="45" name="central-takeaway">
             <a:extLst xmlns:a="http://schemas.openxmlformats.org/drawingml/2006/main">
               <a:ext uri="{FF2B5EF4-FFF2-40B4-BE49-F238E27FC236}">
-                <a16:creationId xmlns:a16="http://schemas.microsoft.com/office/drawing/2014/main" id="{DA4199C3-D957-4E84-B66A-04AC13203E40}"/>
+                <a16:creationId xmlns:a16="http://schemas.microsoft.com/office/drawing/2014/main" id="{B186492A-FD57-4DDF-854C-1D8C887E6338}"/>
               </a:ext>
             </a:extLst>
           </p:cNvPr>
@@ -3130,7 +3130,7 @@
           <p:cNvPr id="46" name="central-takeaway-title">
             <a:extLst xmlns:a="http://schemas.openxmlformats.org/drawingml/2006/main">
               <a:ext uri="{FF2B5EF4-FFF2-40B4-BE49-F238E27FC236}">
-                <a16:creationId xmlns:a16="http://schemas.microsoft.com/office/drawing/2014/main" id="{6A8EBCE6-5E63-4370-9EC4-36D2B9B43B93}"/>
+                <a16:creationId xmlns:a16="http://schemas.microsoft.com/office/drawing/2014/main" id="{BE50EB31-8D4D-467E-B747-84027D2B751F}"/>
               </a:ext>
             </a:extLst>
           </p:cNvPr>
@@ -3180,7 +3180,7 @@
           <p:cNvPr id="47" name="central-takeaway-subtitle">
             <a:extLst xmlns:a="http://schemas.openxmlformats.org/drawingml/2006/main">
               <a:ext uri="{FF2B5EF4-FFF2-40B4-BE49-F238E27FC236}">
-                <a16:creationId xmlns:a16="http://schemas.microsoft.com/office/drawing/2014/main" id="{575662FF-6DD7-4045-B1DB-2FF579E7602E}"/>
+                <a16:creationId xmlns:a16="http://schemas.microsoft.com/office/drawing/2014/main" id="{E00818C0-9230-4C81-859D-BB7430E6D047}"/>
               </a:ext>
             </a:extLst>
           </p:cNvPr>
@@ -3230,7 +3230,7 @@
           <p:cNvPr id="48" name="takeaway-evidence">
             <a:extLst xmlns:a="http://schemas.openxmlformats.org/drawingml/2006/main">
               <a:ext uri="{FF2B5EF4-FFF2-40B4-BE49-F238E27FC236}">
-                <a16:creationId xmlns:a16="http://schemas.microsoft.com/office/drawing/2014/main" id="{7A78AA28-DFBC-4796-98AC-A844616A40F6}"/>
+                <a16:creationId xmlns:a16="http://schemas.microsoft.com/office/drawing/2014/main" id="{16CA19DB-0E1E-47BB-8B22-58561D66953F}"/>
               </a:ext>
             </a:extLst>
           </p:cNvPr>
@@ -3280,7 +3280,7 @@
           <p:cNvPr id="49" name="figure-two-heading-title">
             <a:extLst xmlns:a="http://schemas.openxmlformats.org/drawingml/2006/main">
               <a:ext uri="{FF2B5EF4-FFF2-40B4-BE49-F238E27FC236}">
-                <a16:creationId xmlns:a16="http://schemas.microsoft.com/office/drawing/2014/main" id="{3025610D-5D92-4F91-9ABC-6485F528184F}"/>
+                <a16:creationId xmlns:a16="http://schemas.microsoft.com/office/drawing/2014/main" id="{77138817-371D-4E3F-AD59-127C6BB349E9}"/>
               </a:ext>
             </a:extLst>
           </p:cNvPr>
@@ -3330,7 +3330,7 @@
           <p:cNvPr id="50" name="figure-two-heading-rule">
             <a:extLst xmlns:a="http://schemas.openxmlformats.org/drawingml/2006/main">
               <a:ext uri="{FF2B5EF4-FFF2-40B4-BE49-F238E27FC236}">
-                <a16:creationId xmlns:a16="http://schemas.microsoft.com/office/drawing/2014/main" id="{1AD576D6-5858-4870-A11C-030C77FF910A}"/>
+                <a16:creationId xmlns:a16="http://schemas.microsoft.com/office/drawing/2014/main" id="{D48B1CA3-FE02-409F-BDB1-C1F538964B9E}"/>
               </a:ext>
             </a:extLst>
           </p:cNvPr>
@@ -3363,7 +3363,7 @@
           <p:cNvPr id="51" name="figure-two-frame">
             <a:extLst xmlns:a="http://schemas.openxmlformats.org/drawingml/2006/main">
               <a:ext uri="{FF2B5EF4-FFF2-40B4-BE49-F238E27FC236}">
-                <a16:creationId xmlns:a16="http://schemas.microsoft.com/office/drawing/2014/main" id="{72802015-71F5-4587-8C8B-620E4D7F79A8}"/>
+                <a16:creationId xmlns:a16="http://schemas.microsoft.com/office/drawing/2014/main" id="{A4534782-B2B3-4AA8-9095-C4229038E6AE}"/>
               </a:ext>
             </a:extLst>
           </p:cNvPr>
@@ -3398,7 +3398,7 @@
           <p:cNvPr id="52" name="figure-two-placeholder">
             <a:extLst xmlns:a="http://schemas.openxmlformats.org/drawingml/2006/main">
               <a:ext uri="{FF2B5EF4-FFF2-40B4-BE49-F238E27FC236}">
-                <a16:creationId xmlns:a16="http://schemas.microsoft.com/office/drawing/2014/main" id="{AA15DE1F-05A2-4F16-AE04-7832E0157DEC}"/>
+                <a16:creationId xmlns:a16="http://schemas.microsoft.com/office/drawing/2014/main" id="{40966731-09B5-4D90-A367-696BC3364BC1}"/>
               </a:ext>
             </a:extLst>
           </p:cNvPr>
@@ -3433,7 +3433,7 @@
           <p:cNvPr id="53" name="figure-two-placeholder-label">
             <a:extLst xmlns:a="http://schemas.openxmlformats.org/drawingml/2006/main">
               <a:ext uri="{FF2B5EF4-FFF2-40B4-BE49-F238E27FC236}">
-                <a16:creationId xmlns:a16="http://schemas.microsoft.com/office/drawing/2014/main" id="{A242A8E9-309E-4B99-BDDC-318BBA45A686}"/>
+                <a16:creationId xmlns:a16="http://schemas.microsoft.com/office/drawing/2014/main" id="{F719EB1D-DB88-4D1F-A213-C8C228A42C9D}"/>
               </a:ext>
             </a:extLst>
           </p:cNvPr>
@@ -3483,7 +3483,7 @@
           <p:cNvPr id="54" name="figure-two-caption">
             <a:extLst xmlns:a="http://schemas.openxmlformats.org/drawingml/2006/main">
               <a:ext uri="{FF2B5EF4-FFF2-40B4-BE49-F238E27FC236}">
-                <a16:creationId xmlns:a16="http://schemas.microsoft.com/office/drawing/2014/main" id="{E16E7FB3-64FE-4113-B1AD-EF32F0336F0F}"/>
+                <a16:creationId xmlns:a16="http://schemas.microsoft.com/office/drawing/2014/main" id="{FDD9F43F-17D6-4E1E-8D0B-EF25D8AF72E0}"/>
               </a:ext>
             </a:extLst>
           </p:cNvPr>
@@ -3533,7 +3533,7 @@
           <p:cNvPr id="55" name="figure-two-source">
             <a:extLst xmlns:a="http://schemas.openxmlformats.org/drawingml/2006/main">
               <a:ext uri="{FF2B5EF4-FFF2-40B4-BE49-F238E27FC236}">
-                <a16:creationId xmlns:a16="http://schemas.microsoft.com/office/drawing/2014/main" id="{9E8F4269-6710-44C5-AAE2-D22295D11BF9}"/>
+                <a16:creationId xmlns:a16="http://schemas.microsoft.com/office/drawing/2014/main" id="{BA785F11-41D5-4BB5-9353-2669841BDB9A}"/>
               </a:ext>
             </a:extLst>
           </p:cNvPr>
@@ -3583,7 +3583,7 @@
           <p:cNvPr id="56" name="validation-heading-title">
             <a:extLst xmlns:a="http://schemas.openxmlformats.org/drawingml/2006/main">
               <a:ext uri="{FF2B5EF4-FFF2-40B4-BE49-F238E27FC236}">
-                <a16:creationId xmlns:a16="http://schemas.microsoft.com/office/drawing/2014/main" id="{A64730E5-588D-47DA-B7CA-524956B28ABE}"/>
+                <a16:creationId xmlns:a16="http://schemas.microsoft.com/office/drawing/2014/main" id="{9AF7C265-6908-4B1C-AB53-5A8B4673C6F0}"/>
               </a:ext>
             </a:extLst>
           </p:cNvPr>
@@ -3633,7 +3633,7 @@
           <p:cNvPr id="57" name="validation-heading-rule">
             <a:extLst xmlns:a="http://schemas.openxmlformats.org/drawingml/2006/main">
               <a:ext uri="{FF2B5EF4-FFF2-40B4-BE49-F238E27FC236}">
-                <a16:creationId xmlns:a16="http://schemas.microsoft.com/office/drawing/2014/main" id="{2462AA63-BFB2-4337-AE6F-CD4F462A1CCD}"/>
+                <a16:creationId xmlns:a16="http://schemas.microsoft.com/office/drawing/2014/main" id="{278A4396-0B08-42EE-A880-C801B2C3A14D}"/>
               </a:ext>
             </a:extLst>
           </p:cNvPr>
@@ -3666,7 +3666,7 @@
           <p:cNvPr id="58" name="validation-panel">
             <a:extLst xmlns:a="http://schemas.openxmlformats.org/drawingml/2006/main">
               <a:ext uri="{FF2B5EF4-FFF2-40B4-BE49-F238E27FC236}">
-                <a16:creationId xmlns:a16="http://schemas.microsoft.com/office/drawing/2014/main" id="{CA8A07FE-99F2-4806-9A17-64028D12B4C0}"/>
+                <a16:creationId xmlns:a16="http://schemas.microsoft.com/office/drawing/2014/main" id="{5230FE68-EE64-43BF-96E7-7E56E4FDDC7A}"/>
               </a:ext>
             </a:extLst>
           </p:cNvPr>
@@ -3701,7 +3701,7 @@
           <p:cNvPr id="59" name="validation">
             <a:extLst xmlns:a="http://schemas.openxmlformats.org/drawingml/2006/main">
               <a:ext uri="{FF2B5EF4-FFF2-40B4-BE49-F238E27FC236}">
-                <a16:creationId xmlns:a16="http://schemas.microsoft.com/office/drawing/2014/main" id="{95794275-6809-4C89-910D-C87EF5C7CC89}"/>
+                <a16:creationId xmlns:a16="http://schemas.microsoft.com/office/drawing/2014/main" id="{161358A4-05FC-481A-AA4D-1EBBD829438D}"/>
               </a:ext>
             </a:extLst>
           </p:cNvPr>
@@ -3785,7 +3785,7 @@
           <p:cNvPr id="60" name="validation-evidence">
             <a:extLst xmlns:a="http://schemas.openxmlformats.org/drawingml/2006/main">
               <a:ext uri="{FF2B5EF4-FFF2-40B4-BE49-F238E27FC236}">
-                <a16:creationId xmlns:a16="http://schemas.microsoft.com/office/drawing/2014/main" id="{E01CB8EB-39FA-4B62-889B-4D76302BCF6B}"/>
+                <a16:creationId xmlns:a16="http://schemas.microsoft.com/office/drawing/2014/main" id="{AA037403-395F-42A1-8980-411322AEF28C}"/>
               </a:ext>
             </a:extLst>
           </p:cNvPr>
@@ -3835,7 +3835,7 @@
           <p:cNvPr id="61" name="performance-strip">
             <a:extLst xmlns:a="http://schemas.openxmlformats.org/drawingml/2006/main">
               <a:ext uri="{FF2B5EF4-FFF2-40B4-BE49-F238E27FC236}">
-                <a16:creationId xmlns:a16="http://schemas.microsoft.com/office/drawing/2014/main" id="{CC8D3281-A93D-425C-9987-4FF37D471F3B}"/>
+                <a16:creationId xmlns:a16="http://schemas.microsoft.com/office/drawing/2014/main" id="{20F5D06D-F796-4AB7-BF0F-B2BECE3CCEAE}"/>
               </a:ext>
             </a:extLst>
           </p:cNvPr>
@@ -3868,7 +3868,7 @@
           <p:cNvPr id="62" name="performance-strip-text">
             <a:extLst xmlns:a="http://schemas.openxmlformats.org/drawingml/2006/main">
               <a:ext uri="{FF2B5EF4-FFF2-40B4-BE49-F238E27FC236}">
-                <a16:creationId xmlns:a16="http://schemas.microsoft.com/office/drawing/2014/main" id="{A6C6C52B-77AD-4FD7-A04A-AD813D67D889}"/>
+                <a16:creationId xmlns:a16="http://schemas.microsoft.com/office/drawing/2014/main" id="{9368F963-BBB7-4479-98D9-04EA4EE1CCD4}"/>
               </a:ext>
             </a:extLst>
           </p:cNvPr>
@@ -3918,7 +3918,7 @@
           <p:cNvPr id="63" name="biology-heading-title">
             <a:extLst xmlns:a="http://schemas.openxmlformats.org/drawingml/2006/main">
               <a:ext uri="{FF2B5EF4-FFF2-40B4-BE49-F238E27FC236}">
-                <a16:creationId xmlns:a16="http://schemas.microsoft.com/office/drawing/2014/main" id="{A067DF44-D54E-4E82-A97A-DFEEE1F4EB80}"/>
+                <a16:creationId xmlns:a16="http://schemas.microsoft.com/office/drawing/2014/main" id="{4AA42F1D-DC24-4C0A-84F0-B13FCE51FD76}"/>
               </a:ext>
             </a:extLst>
           </p:cNvPr>
@@ -3968,7 +3968,7 @@
           <p:cNvPr id="64" name="biology-heading-rule">
             <a:extLst xmlns:a="http://schemas.openxmlformats.org/drawingml/2006/main">
               <a:ext uri="{FF2B5EF4-FFF2-40B4-BE49-F238E27FC236}">
-                <a16:creationId xmlns:a16="http://schemas.microsoft.com/office/drawing/2014/main" id="{D055AEC1-A274-4F8C-9A51-42E3D669CBFC}"/>
+                <a16:creationId xmlns:a16="http://schemas.microsoft.com/office/drawing/2014/main" id="{95B03679-DD8F-4FF9-9FF3-86F9834ABF91}"/>
               </a:ext>
             </a:extLst>
           </p:cNvPr>
@@ -4001,7 +4001,7 @@
           <p:cNvPr id="65" name="biology-1-value">
             <a:extLst xmlns:a="http://schemas.openxmlformats.org/drawingml/2006/main">
               <a:ext uri="{FF2B5EF4-FFF2-40B4-BE49-F238E27FC236}">
-                <a16:creationId xmlns:a16="http://schemas.microsoft.com/office/drawing/2014/main" id="{251D5F24-2DFE-4804-BF61-6DABB96A477E}"/>
+                <a16:creationId xmlns:a16="http://schemas.microsoft.com/office/drawing/2014/main" id="{E886F2EE-168B-419F-BC1A-EFEFC4BE1A5F}"/>
               </a:ext>
             </a:extLst>
           </p:cNvPr>
@@ -4051,7 +4051,7 @@
           <p:cNvPr id="66" name="biology-1-label">
             <a:extLst xmlns:a="http://schemas.openxmlformats.org/drawingml/2006/main">
               <a:ext uri="{FF2B5EF4-FFF2-40B4-BE49-F238E27FC236}">
-                <a16:creationId xmlns:a16="http://schemas.microsoft.com/office/drawing/2014/main" id="{8503B3F9-80D0-476C-B152-4FFE824675EC}"/>
+                <a16:creationId xmlns:a16="http://schemas.microsoft.com/office/drawing/2014/main" id="{67AF3683-8FA5-42A7-B033-053A1399F8F1}"/>
               </a:ext>
             </a:extLst>
           </p:cNvPr>
@@ -4101,7 +4101,7 @@
           <p:cNvPr id="67" name="biology-2-value">
             <a:extLst xmlns:a="http://schemas.openxmlformats.org/drawingml/2006/main">
               <a:ext uri="{FF2B5EF4-FFF2-40B4-BE49-F238E27FC236}">
-                <a16:creationId xmlns:a16="http://schemas.microsoft.com/office/drawing/2014/main" id="{F8C33D01-6447-414E-98A3-3DDE7EA56506}"/>
+                <a16:creationId xmlns:a16="http://schemas.microsoft.com/office/drawing/2014/main" id="{69D20308-546A-4D5B-8CAC-7FD7B641A05F}"/>
               </a:ext>
             </a:extLst>
           </p:cNvPr>
@@ -4151,7 +4151,7 @@
           <p:cNvPr id="68" name="biology-2-label">
             <a:extLst xmlns:a="http://schemas.openxmlformats.org/drawingml/2006/main">
               <a:ext uri="{FF2B5EF4-FFF2-40B4-BE49-F238E27FC236}">
-                <a16:creationId xmlns:a16="http://schemas.microsoft.com/office/drawing/2014/main" id="{9DFE34E7-469F-44D7-B83E-DE66F6FDB15E}"/>
+                <a16:creationId xmlns:a16="http://schemas.microsoft.com/office/drawing/2014/main" id="{82266E11-3841-4AB3-9A89-06248DAE485D}"/>
               </a:ext>
             </a:extLst>
           </p:cNvPr>
@@ -4201,7 +4201,7 @@
           <p:cNvPr id="69" name="biology-3-value">
             <a:extLst xmlns:a="http://schemas.openxmlformats.org/drawingml/2006/main">
               <a:ext uri="{FF2B5EF4-FFF2-40B4-BE49-F238E27FC236}">
-                <a16:creationId xmlns:a16="http://schemas.microsoft.com/office/drawing/2014/main" id="{6FE5C627-8FA1-40ED-8FC7-C9C7BBA7E95D}"/>
+                <a16:creationId xmlns:a16="http://schemas.microsoft.com/office/drawing/2014/main" id="{25470DC5-F603-44AE-BB08-0FAA42077FCA}"/>
               </a:ext>
             </a:extLst>
           </p:cNvPr>
@@ -4251,7 +4251,7 @@
           <p:cNvPr id="70" name="biology-3-label">
             <a:extLst xmlns:a="http://schemas.openxmlformats.org/drawingml/2006/main">
               <a:ext uri="{FF2B5EF4-FFF2-40B4-BE49-F238E27FC236}">
-                <a16:creationId xmlns:a16="http://schemas.microsoft.com/office/drawing/2014/main" id="{77FD8D22-2E00-4BE9-9501-82561130D553}"/>
+                <a16:creationId xmlns:a16="http://schemas.microsoft.com/office/drawing/2014/main" id="{CD197926-9C28-439B-8B8F-6F0F7EC98548}"/>
               </a:ext>
             </a:extLst>
           </p:cNvPr>
@@ -4301,7 +4301,7 @@
           <p:cNvPr id="71" name="biology-evidence">
             <a:extLst xmlns:a="http://schemas.openxmlformats.org/drawingml/2006/main">
               <a:ext uri="{FF2B5EF4-FFF2-40B4-BE49-F238E27FC236}">
-                <a16:creationId xmlns:a16="http://schemas.microsoft.com/office/drawing/2014/main" id="{16BC3587-D6BC-4DE9-96EC-0D73CC514CF5}"/>
+                <a16:creationId xmlns:a16="http://schemas.microsoft.com/office/drawing/2014/main" id="{0F8D0C3B-ECFC-40FC-ADE7-8AD15676E273}"/>
               </a:ext>
             </a:extLst>
           </p:cNvPr>
@@ -4351,7 +4351,7 @@
           <p:cNvPr id="72" name="figure-three-frame">
             <a:extLst xmlns:a="http://schemas.openxmlformats.org/drawingml/2006/main">
               <a:ext uri="{FF2B5EF4-FFF2-40B4-BE49-F238E27FC236}">
-                <a16:creationId xmlns:a16="http://schemas.microsoft.com/office/drawing/2014/main" id="{87D983B2-1343-4EB6-8E8E-5D8E7D3784F2}"/>
+                <a16:creationId xmlns:a16="http://schemas.microsoft.com/office/drawing/2014/main" id="{2E9E538A-7719-40FE-A36E-4531D0543429}"/>
               </a:ext>
             </a:extLst>
           </p:cNvPr>
@@ -4386,7 +4386,7 @@
           <p:cNvPr id="73" name="figure-three-placeholder">
             <a:extLst xmlns:a="http://schemas.openxmlformats.org/drawingml/2006/main">
               <a:ext uri="{FF2B5EF4-FFF2-40B4-BE49-F238E27FC236}">
-                <a16:creationId xmlns:a16="http://schemas.microsoft.com/office/drawing/2014/main" id="{C5BF1BE9-8550-4607-A022-28348C3591A8}"/>
+                <a16:creationId xmlns:a16="http://schemas.microsoft.com/office/drawing/2014/main" id="{920BEFC8-8AF4-4B84-9C69-AEDBAD709F4B}"/>
               </a:ext>
             </a:extLst>
           </p:cNvPr>
@@ -4421,7 +4421,7 @@
           <p:cNvPr id="74" name="figure-three-placeholder-label">
             <a:extLst xmlns:a="http://schemas.openxmlformats.org/drawingml/2006/main">
               <a:ext uri="{FF2B5EF4-FFF2-40B4-BE49-F238E27FC236}">
-                <a16:creationId xmlns:a16="http://schemas.microsoft.com/office/drawing/2014/main" id="{8AB01FC3-16A0-41AA-BEF7-2B500414CD94}"/>
+                <a16:creationId xmlns:a16="http://schemas.microsoft.com/office/drawing/2014/main" id="{BBCC9C6E-ACD3-47F0-9723-8EA939AFC16B}"/>
               </a:ext>
             </a:extLst>
           </p:cNvPr>
@@ -4471,7 +4471,7 @@
           <p:cNvPr id="75" name="figure-three-caption">
             <a:extLst xmlns:a="http://schemas.openxmlformats.org/drawingml/2006/main">
               <a:ext uri="{FF2B5EF4-FFF2-40B4-BE49-F238E27FC236}">
-                <a16:creationId xmlns:a16="http://schemas.microsoft.com/office/drawing/2014/main" id="{0842B4B5-BEF4-4D7E-A13C-2DAB014D14AD}"/>
+                <a16:creationId xmlns:a16="http://schemas.microsoft.com/office/drawing/2014/main" id="{B402CA0E-7CDA-4F27-AB5E-91B1FE64E988}"/>
               </a:ext>
             </a:extLst>
           </p:cNvPr>
@@ -4521,7 +4521,7 @@
           <p:cNvPr id="76" name="figure-three-source">
             <a:extLst xmlns:a="http://schemas.openxmlformats.org/drawingml/2006/main">
               <a:ext uri="{FF2B5EF4-FFF2-40B4-BE49-F238E27FC236}">
-                <a16:creationId xmlns:a16="http://schemas.microsoft.com/office/drawing/2014/main" id="{5F33CEB1-0714-41EB-9D68-5E8E1E2A81E6}"/>
+                <a16:creationId xmlns:a16="http://schemas.microsoft.com/office/drawing/2014/main" id="{475E76EB-0EA8-458D-B0C4-1CCD72D43A24}"/>
               </a:ext>
             </a:extLst>
           </p:cNvPr>
@@ -4571,7 +4571,7 @@
           <p:cNvPr id="77" name="validation-visual-heading-title">
             <a:extLst xmlns:a="http://schemas.openxmlformats.org/drawingml/2006/main">
               <a:ext uri="{FF2B5EF4-FFF2-40B4-BE49-F238E27FC236}">
-                <a16:creationId xmlns:a16="http://schemas.microsoft.com/office/drawing/2014/main" id="{D8D70E3A-5898-4619-88B0-9678E59FA8E0}"/>
+                <a16:creationId xmlns:a16="http://schemas.microsoft.com/office/drawing/2014/main" id="{054159F5-665E-4895-80B1-BF491472AF28}"/>
               </a:ext>
             </a:extLst>
           </p:cNvPr>
@@ -4621,7 +4621,7 @@
           <p:cNvPr id="78" name="validation-visual-heading-rule">
             <a:extLst xmlns:a="http://schemas.openxmlformats.org/drawingml/2006/main">
               <a:ext uri="{FF2B5EF4-FFF2-40B4-BE49-F238E27FC236}">
-                <a16:creationId xmlns:a16="http://schemas.microsoft.com/office/drawing/2014/main" id="{C78C070E-B3B4-4506-8119-E39CEE214641}"/>
+                <a16:creationId xmlns:a16="http://schemas.microsoft.com/office/drawing/2014/main" id="{5D8EFD96-D5C3-4FEB-A702-9F560CBB82A8}"/>
               </a:ext>
             </a:extLst>
           </p:cNvPr>
@@ -4654,7 +4654,7 @@
           <p:cNvPr id="79" name="figure-four-frame">
             <a:extLst xmlns:a="http://schemas.openxmlformats.org/drawingml/2006/main">
               <a:ext uri="{FF2B5EF4-FFF2-40B4-BE49-F238E27FC236}">
-                <a16:creationId xmlns:a16="http://schemas.microsoft.com/office/drawing/2014/main" id="{C7B9C5FB-F775-46CD-98C9-D4A8F93829BC}"/>
+                <a16:creationId xmlns:a16="http://schemas.microsoft.com/office/drawing/2014/main" id="{331BFBD7-1AC0-4386-9232-30642E81821D}"/>
               </a:ext>
             </a:extLst>
           </p:cNvPr>
@@ -4689,7 +4689,7 @@
           <p:cNvPr id="80" name="figure-four-placeholder">
             <a:extLst xmlns:a="http://schemas.openxmlformats.org/drawingml/2006/main">
               <a:ext uri="{FF2B5EF4-FFF2-40B4-BE49-F238E27FC236}">
-                <a16:creationId xmlns:a16="http://schemas.microsoft.com/office/drawing/2014/main" id="{E62DEB0F-73B3-4C79-AA59-022BD2E205D7}"/>
+                <a16:creationId xmlns:a16="http://schemas.microsoft.com/office/drawing/2014/main" id="{DE3B40D5-FA3F-42D5-9104-12BDB649AB85}"/>
               </a:ext>
             </a:extLst>
           </p:cNvPr>
@@ -4724,7 +4724,7 @@
           <p:cNvPr id="81" name="figure-four-placeholder-label">
             <a:extLst xmlns:a="http://schemas.openxmlformats.org/drawingml/2006/main">
               <a:ext uri="{FF2B5EF4-FFF2-40B4-BE49-F238E27FC236}">
-                <a16:creationId xmlns:a16="http://schemas.microsoft.com/office/drawing/2014/main" id="{DB3AAC41-25BD-4E22-99DC-FA2269E36884}"/>
+                <a16:creationId xmlns:a16="http://schemas.microsoft.com/office/drawing/2014/main" id="{0817079E-073D-414F-A94F-E5E625FF4DCE}"/>
               </a:ext>
             </a:extLst>
           </p:cNvPr>
@@ -4774,7 +4774,7 @@
           <p:cNvPr id="82" name="figure-four-caption">
             <a:extLst xmlns:a="http://schemas.openxmlformats.org/drawingml/2006/main">
               <a:ext uri="{FF2B5EF4-FFF2-40B4-BE49-F238E27FC236}">
-                <a16:creationId xmlns:a16="http://schemas.microsoft.com/office/drawing/2014/main" id="{CF14A3FC-ECFE-4092-B4AE-8701BAF25EC7}"/>
+                <a16:creationId xmlns:a16="http://schemas.microsoft.com/office/drawing/2014/main" id="{78E5A1BA-025B-4AAB-BAE9-3771925B0ACD}"/>
               </a:ext>
             </a:extLst>
           </p:cNvPr>
@@ -4824,7 +4824,7 @@
           <p:cNvPr id="83" name="figure-four-source">
             <a:extLst xmlns:a="http://schemas.openxmlformats.org/drawingml/2006/main">
               <a:ext uri="{FF2B5EF4-FFF2-40B4-BE49-F238E27FC236}">
-                <a16:creationId xmlns:a16="http://schemas.microsoft.com/office/drawing/2014/main" id="{AF23F82F-2D27-4BA4-A184-D9BB8FB632D5}"/>
+                <a16:creationId xmlns:a16="http://schemas.microsoft.com/office/drawing/2014/main" id="{60B41803-F18E-4E80-B6C5-24CCF6CD8F2B}"/>
               </a:ext>
             </a:extLst>
           </p:cNvPr>
@@ -4874,7 +4874,7 @@
           <p:cNvPr id="84" name="conclusion-heading-title">
             <a:extLst xmlns:a="http://schemas.openxmlformats.org/drawingml/2006/main">
               <a:ext uri="{FF2B5EF4-FFF2-40B4-BE49-F238E27FC236}">
-                <a16:creationId xmlns:a16="http://schemas.microsoft.com/office/drawing/2014/main" id="{950314F1-8190-4238-9C06-77FACEBCC004}"/>
+                <a16:creationId xmlns:a16="http://schemas.microsoft.com/office/drawing/2014/main" id="{8BE07A80-A8C6-4EDE-9053-2F0DB8813987}"/>
               </a:ext>
             </a:extLst>
           </p:cNvPr>
@@ -4924,7 +4924,7 @@
           <p:cNvPr id="85" name="conclusion-heading-rule">
             <a:extLst xmlns:a="http://schemas.openxmlformats.org/drawingml/2006/main">
               <a:ext uri="{FF2B5EF4-FFF2-40B4-BE49-F238E27FC236}">
-                <a16:creationId xmlns:a16="http://schemas.microsoft.com/office/drawing/2014/main" id="{FA5B5DAC-D53F-45C5-8076-18C8B5F66F0C}"/>
+                <a16:creationId xmlns:a16="http://schemas.microsoft.com/office/drawing/2014/main" id="{2810B753-0E09-4190-BC42-A858EA8A25F6}"/>
               </a:ext>
             </a:extLst>
           </p:cNvPr>
@@ -4957,7 +4957,7 @@
           <p:cNvPr id="86" name="conclusion-panel">
             <a:extLst xmlns:a="http://schemas.openxmlformats.org/drawingml/2006/main">
               <a:ext uri="{FF2B5EF4-FFF2-40B4-BE49-F238E27FC236}">
-                <a16:creationId xmlns:a16="http://schemas.microsoft.com/office/drawing/2014/main" id="{D9A2641D-035C-4178-9662-A365407E2FEA}"/>
+                <a16:creationId xmlns:a16="http://schemas.microsoft.com/office/drawing/2014/main" id="{D604FA5C-9219-4E23-BC5F-BEE055997ED2}"/>
               </a:ext>
             </a:extLst>
           </p:cNvPr>
@@ -4992,7 +4992,7 @@
           <p:cNvPr id="87" name="conclusion">
             <a:extLst xmlns:a="http://schemas.openxmlformats.org/drawingml/2006/main">
               <a:ext uri="{FF2B5EF4-FFF2-40B4-BE49-F238E27FC236}">
-                <a16:creationId xmlns:a16="http://schemas.microsoft.com/office/drawing/2014/main" id="{0C2914EC-137A-4402-A46E-C44EB06D58C2}"/>
+                <a16:creationId xmlns:a16="http://schemas.microsoft.com/office/drawing/2014/main" id="{8D443FD8-D095-4019-BF74-545292EF0B13}"/>
               </a:ext>
             </a:extLst>
           </p:cNvPr>
@@ -5042,7 +5042,7 @@
           <p:cNvPr id="88" name="conclusion-evidence">
             <a:extLst xmlns:a="http://schemas.openxmlformats.org/drawingml/2006/main">
               <a:ext uri="{FF2B5EF4-FFF2-40B4-BE49-F238E27FC236}">
-                <a16:creationId xmlns:a16="http://schemas.microsoft.com/office/drawing/2014/main" id="{0D6D63F7-D852-4C16-A407-5D001C25FB68}"/>
+                <a16:creationId xmlns:a16="http://schemas.microsoft.com/office/drawing/2014/main" id="{2FAA40DF-364B-4893-A2F8-3022EFE65E2E}"/>
               </a:ext>
             </a:extLst>
           </p:cNvPr>
@@ -5092,7 +5092,7 @@
           <p:cNvPr id="89" name="footer-band">
             <a:extLst xmlns:a="http://schemas.openxmlformats.org/drawingml/2006/main">
               <a:ext uri="{FF2B5EF4-FFF2-40B4-BE49-F238E27FC236}">
-                <a16:creationId xmlns:a16="http://schemas.microsoft.com/office/drawing/2014/main" id="{B5DE944C-3C93-4C4C-A6E2-615FC11CBCFC}"/>
+                <a16:creationId xmlns:a16="http://schemas.microsoft.com/office/drawing/2014/main" id="{9B99837B-CF09-42F5-8230-DC3198F08858}"/>
               </a:ext>
             </a:extLst>
           </p:cNvPr>
@@ -5125,7 +5125,7 @@
           <p:cNvPr id="90" name="footer-source">
             <a:extLst xmlns:a="http://schemas.openxmlformats.org/drawingml/2006/main">
               <a:ext uri="{FF2B5EF4-FFF2-40B4-BE49-F238E27FC236}">
-                <a16:creationId xmlns:a16="http://schemas.microsoft.com/office/drawing/2014/main" id="{AFC33F09-8AB6-44E0-9903-C835568A0294}"/>
+                <a16:creationId xmlns:a16="http://schemas.microsoft.com/office/drawing/2014/main" id="{AF38A968-95B8-4F39-B984-B296EB4CDC74}"/>
               </a:ext>
             </a:extLst>
           </p:cNvPr>
@@ -5175,7 +5175,7 @@
           <p:cNvPr id="91" name="footer-status">
             <a:extLst xmlns:a="http://schemas.openxmlformats.org/drawingml/2006/main">
               <a:ext uri="{FF2B5EF4-FFF2-40B4-BE49-F238E27FC236}">
-                <a16:creationId xmlns:a16="http://schemas.microsoft.com/office/drawing/2014/main" id="{6191BD76-4B39-4AE4-ACDB-A5187315A76D}"/>
+                <a16:creationId xmlns:a16="http://schemas.microsoft.com/office/drawing/2014/main" id="{34BC6ABE-8C6B-47AE-8ED5-81D7F381D303}"/>
               </a:ext>
             </a:extLst>
           </p:cNvPr>
@@ -5223,7 +5223,7 @@
     </p:spTree>
     <p:extLst>
       <p:ext uri="{BB962C8B-B14F-4D97-AF65-F5344CB8AC3E}">
-        <p14:creationId xmlns:p14="http://schemas.microsoft.com/office/powerpoint/2010/main" val="855134231"/>
+        <p14:creationId xmlns:p14="http://schemas.microsoft.com/office/powerpoint/2010/main" val="2006883071"/>
       </p:ext>
     </p:extLst>
   </p:cSld>
